--- a/topic01-objects-and-classes/unit-1/talk-0/Understanding_the_JVM.pptx
+++ b/topic01-objects-and-classes/unit-1/talk-0/Understanding_the_JVM.pptx
@@ -219,7 +219,7 @@
           <a:p>
             <a:fld id="{56BC3C30-7F3D-4B20-9974-47C57B22CA6E}" type="datetimeFigureOut">
               <a:rPr lang="en-IE" smtClean="0"/>
-              <a:t>17/02/2025</a:t>
+              <a:t>14/09/2025</a:t>
             </a:fld>
             <a:endParaRPr lang="en-IE"/>
           </a:p>
@@ -554,7 +554,7 @@
               </a14:hiddenLine>
             </a:ext>
             <a:ext uri="{FAA26D3D-D897-4be2-8F04-BA451C77F1D7}">
-              <ma14:placeholderFlag xmlns="" xmlns:ma14="http://schemas.microsoft.com/office/mac/drawingml/2011/main" val="1"/>
+              <ma14:placeholderFlag xmlns:ma14="http://schemas.microsoft.com/office/mac/drawingml/2011/main" xmlns="" val="1"/>
             </a:ext>
           </a:extLst>
         </p:spPr>
@@ -761,7 +761,7 @@
             <a:fld id="{1D8BD707-D9CF-40AE-B4C6-C98DA3205C09}" type="datetimeFigureOut">
               <a:rPr lang="en-US" smtClean="0"/>
               <a:pPr/>
-              <a:t>2/17/25</a:t>
+              <a:t>9/14/25</a:t>
             </a:fld>
             <a:endParaRPr lang="en-US"/>
           </a:p>
@@ -926,7 +926,7 @@
             <a:fld id="{1D8BD707-D9CF-40AE-B4C6-C98DA3205C09}" type="datetimeFigureOut">
               <a:rPr lang="en-US" smtClean="0"/>
               <a:pPr/>
-              <a:t>2/17/25</a:t>
+              <a:t>9/14/25</a:t>
             </a:fld>
             <a:endParaRPr lang="en-US"/>
           </a:p>
@@ -1101,7 +1101,7 @@
             <a:fld id="{1D8BD707-D9CF-40AE-B4C6-C98DA3205C09}" type="datetimeFigureOut">
               <a:rPr lang="en-US" smtClean="0"/>
               <a:pPr/>
-              <a:t>2/17/25</a:t>
+              <a:t>9/14/25</a:t>
             </a:fld>
             <a:endParaRPr lang="en-US"/>
           </a:p>
@@ -1277,7 +1277,7 @@
             <a:fld id="{1D8BD707-D9CF-40AE-B4C6-C98DA3205C09}" type="datetimeFigureOut">
               <a:rPr lang="en-US" smtClean="0"/>
               <a:pPr/>
-              <a:t>2/17/25</a:t>
+              <a:t>9/14/25</a:t>
             </a:fld>
             <a:endParaRPr lang="en-US"/>
           </a:p>
@@ -1557,7 +1557,7 @@
             <a:fld id="{1D8BD707-D9CF-40AE-B4C6-C98DA3205C09}" type="datetimeFigureOut">
               <a:rPr lang="en-US" smtClean="0"/>
               <a:pPr/>
-              <a:t>2/17/25</a:t>
+              <a:t>9/14/25</a:t>
             </a:fld>
             <a:endParaRPr lang="en-US"/>
           </a:p>
@@ -1850,7 +1850,7 @@
             <a:fld id="{1D8BD707-D9CF-40AE-B4C6-C98DA3205C09}" type="datetimeFigureOut">
               <a:rPr lang="en-US" smtClean="0"/>
               <a:pPr/>
-              <a:t>2/17/25</a:t>
+              <a:t>9/14/25</a:t>
             </a:fld>
             <a:endParaRPr lang="en-US"/>
           </a:p>
@@ -2308,7 +2308,7 @@
             <a:fld id="{1D8BD707-D9CF-40AE-B4C6-C98DA3205C09}" type="datetimeFigureOut">
               <a:rPr lang="en-US" smtClean="0"/>
               <a:pPr/>
-              <a:t>2/17/25</a:t>
+              <a:t>9/14/25</a:t>
             </a:fld>
             <a:endParaRPr lang="en-US"/>
           </a:p>
@@ -2468,7 +2468,7 @@
             <a:fld id="{1D8BD707-D9CF-40AE-B4C6-C98DA3205C09}" type="datetimeFigureOut">
               <a:rPr lang="en-US" smtClean="0"/>
               <a:pPr/>
-              <a:t>2/17/25</a:t>
+              <a:t>9/14/25</a:t>
             </a:fld>
             <a:endParaRPr lang="en-US"/>
           </a:p>
@@ -2595,7 +2595,7 @@
             <a:fld id="{1D8BD707-D9CF-40AE-B4C6-C98DA3205C09}" type="datetimeFigureOut">
               <a:rPr lang="en-US" smtClean="0"/>
               <a:pPr/>
-              <a:t>2/17/25</a:t>
+              <a:t>9/14/25</a:t>
             </a:fld>
             <a:endParaRPr lang="en-US"/>
           </a:p>
@@ -2867,7 +2867,7 @@
             <a:fld id="{1D8BD707-D9CF-40AE-B4C6-C98DA3205C09}" type="datetimeFigureOut">
               <a:rPr lang="en-US" smtClean="0"/>
               <a:pPr/>
-              <a:t>2/17/25</a:t>
+              <a:t>9/14/25</a:t>
             </a:fld>
             <a:endParaRPr lang="en-US"/>
           </a:p>
@@ -3116,7 +3116,7 @@
             <a:fld id="{1D8BD707-D9CF-40AE-B4C6-C98DA3205C09}" type="datetimeFigureOut">
               <a:rPr lang="en-US" smtClean="0"/>
               <a:pPr/>
-              <a:t>2/17/25</a:t>
+              <a:t>9/14/25</a:t>
             </a:fld>
             <a:endParaRPr lang="en-US"/>
           </a:p>
@@ -3324,7 +3324,7 @@
             <a:fld id="{1D8BD707-D9CF-40AE-B4C6-C98DA3205C09}" type="datetimeFigureOut">
               <a:rPr lang="en-US" smtClean="0"/>
               <a:pPr/>
-              <a:t>2/17/25</a:t>
+              <a:t>9/14/25</a:t>
             </a:fld>
             <a:endParaRPr lang="en-US"/>
           </a:p>
@@ -3681,6 +3681,16 @@
 <file path=ppt/slides/slide1.xml><?xml version="1.0" encoding="utf-8"?>
 <p:sld xmlns:a="http://schemas.openxmlformats.org/drawingml/2006/main" xmlns:r="http://schemas.openxmlformats.org/officeDocument/2006/relationships" xmlns:p="http://schemas.openxmlformats.org/presentationml/2006/main">
   <p:cSld>
+    <p:bg>
+      <p:bgPr>
+        <a:solidFill>
+          <a:schemeClr val="bg1">
+            <a:lumMod val="85000"/>
+          </a:schemeClr>
+        </a:solidFill>
+        <a:effectLst/>
+      </p:bgPr>
+    </p:bg>
     <p:spTree>
       <p:nvGrpSpPr>
         <p:cNvPr id="1" name=""/>
@@ -4085,6 +4095,16 @@
 <file path=ppt/slides/slide10.xml><?xml version="1.0" encoding="utf-8"?>
 <p:sld xmlns:a="http://schemas.openxmlformats.org/drawingml/2006/main" xmlns:r="http://schemas.openxmlformats.org/officeDocument/2006/relationships" xmlns:p="http://schemas.openxmlformats.org/presentationml/2006/main">
   <p:cSld>
+    <p:bg>
+      <p:bgPr>
+        <a:solidFill>
+          <a:schemeClr val="bg1">
+            <a:lumMod val="85000"/>
+          </a:schemeClr>
+        </a:solidFill>
+        <a:effectLst/>
+      </p:bgPr>
+    </p:bg>
     <p:spTree>
       <p:nvGrpSpPr>
         <p:cNvPr id="1" name=""/>
@@ -4652,6 +4672,16 @@
 <file path=ppt/slides/slide11.xml><?xml version="1.0" encoding="utf-8"?>
 <p:sld xmlns:a="http://schemas.openxmlformats.org/drawingml/2006/main" xmlns:r="http://schemas.openxmlformats.org/officeDocument/2006/relationships" xmlns:p="http://schemas.openxmlformats.org/presentationml/2006/main">
   <p:cSld>
+    <p:bg>
+      <p:bgPr>
+        <a:solidFill>
+          <a:schemeClr val="bg1">
+            <a:lumMod val="85000"/>
+          </a:schemeClr>
+        </a:solidFill>
+        <a:effectLst/>
+      </p:bgPr>
+    </p:bg>
     <p:spTree>
       <p:nvGrpSpPr>
         <p:cNvPr id="1" name=""/>
@@ -5016,6 +5046,16 @@
 <file path=ppt/slides/slide12.xml><?xml version="1.0" encoding="utf-8"?>
 <p:sld xmlns:a="http://schemas.openxmlformats.org/drawingml/2006/main" xmlns:r="http://schemas.openxmlformats.org/officeDocument/2006/relationships" xmlns:p="http://schemas.openxmlformats.org/presentationml/2006/main">
   <p:cSld>
+    <p:bg>
+      <p:bgPr>
+        <a:solidFill>
+          <a:schemeClr val="bg1">
+            <a:lumMod val="85000"/>
+          </a:schemeClr>
+        </a:solidFill>
+        <a:effectLst/>
+      </p:bgPr>
+    </p:bg>
     <p:spTree>
       <p:nvGrpSpPr>
         <p:cNvPr id="1" name=""/>
@@ -5109,6 +5149,16 @@
 <file path=ppt/slides/slide2.xml><?xml version="1.0" encoding="utf-8"?>
 <p:sld xmlns:a="http://schemas.openxmlformats.org/drawingml/2006/main" xmlns:r="http://schemas.openxmlformats.org/officeDocument/2006/relationships" xmlns:p="http://schemas.openxmlformats.org/presentationml/2006/main">
   <p:cSld>
+    <p:bg>
+      <p:bgPr>
+        <a:solidFill>
+          <a:schemeClr val="bg1">
+            <a:lumMod val="85000"/>
+          </a:schemeClr>
+        </a:solidFill>
+        <a:effectLst/>
+      </p:bgPr>
+    </p:bg>
     <p:spTree>
       <p:nvGrpSpPr>
         <p:cNvPr id="1" name=""/>
@@ -5349,6 +5399,16 @@
 <file path=ppt/slides/slide3.xml><?xml version="1.0" encoding="utf-8"?>
 <p:sld xmlns:a="http://schemas.openxmlformats.org/drawingml/2006/main" xmlns:r="http://schemas.openxmlformats.org/officeDocument/2006/relationships" xmlns:p="http://schemas.openxmlformats.org/presentationml/2006/main">
   <p:cSld>
+    <p:bg>
+      <p:bgPr>
+        <a:solidFill>
+          <a:schemeClr val="bg1">
+            <a:lumMod val="85000"/>
+          </a:schemeClr>
+        </a:solidFill>
+        <a:effectLst/>
+      </p:bgPr>
+    </p:bg>
     <p:spTree>
       <p:nvGrpSpPr>
         <p:cNvPr id="1" name=""/>
@@ -6338,6 +6398,16 @@
 <file path=ppt/slides/slide4.xml><?xml version="1.0" encoding="utf-8"?>
 <p:sld xmlns:a="http://schemas.openxmlformats.org/drawingml/2006/main" xmlns:r="http://schemas.openxmlformats.org/officeDocument/2006/relationships" xmlns:p="http://schemas.openxmlformats.org/presentationml/2006/main">
   <p:cSld>
+    <p:bg>
+      <p:bgPr>
+        <a:solidFill>
+          <a:schemeClr val="bg1">
+            <a:lumMod val="85000"/>
+          </a:schemeClr>
+        </a:solidFill>
+        <a:effectLst/>
+      </p:bgPr>
+    </p:bg>
     <p:spTree>
       <p:nvGrpSpPr>
         <p:cNvPr id="1" name=""/>
@@ -6452,6 +6522,16 @@
 <file path=ppt/slides/slide5.xml><?xml version="1.0" encoding="utf-8"?>
 <p:sld xmlns:a="http://schemas.openxmlformats.org/drawingml/2006/main" xmlns:r="http://schemas.openxmlformats.org/officeDocument/2006/relationships" xmlns:p="http://schemas.openxmlformats.org/presentationml/2006/main">
   <p:cSld>
+    <p:bg>
+      <p:bgPr>
+        <a:solidFill>
+          <a:schemeClr val="bg1">
+            <a:lumMod val="85000"/>
+          </a:schemeClr>
+        </a:solidFill>
+        <a:effectLst/>
+      </p:bgPr>
+    </p:bg>
     <p:spTree>
       <p:nvGrpSpPr>
         <p:cNvPr id="1" name=""/>
@@ -6692,6 +6772,16 @@
 <file path=ppt/slides/slide6.xml><?xml version="1.0" encoding="utf-8"?>
 <p:sld xmlns:a="http://schemas.openxmlformats.org/drawingml/2006/main" xmlns:r="http://schemas.openxmlformats.org/officeDocument/2006/relationships" xmlns:p="http://schemas.openxmlformats.org/presentationml/2006/main">
   <p:cSld>
+    <p:bg>
+      <p:bgPr>
+        <a:solidFill>
+          <a:schemeClr val="bg1">
+            <a:lumMod val="85000"/>
+          </a:schemeClr>
+        </a:solidFill>
+        <a:effectLst/>
+      </p:bgPr>
+    </p:bg>
     <p:spTree>
       <p:nvGrpSpPr>
         <p:cNvPr id="1" name=""/>
@@ -7111,6 +7201,16 @@
 <file path=ppt/slides/slide7.xml><?xml version="1.0" encoding="utf-8"?>
 <p:sld xmlns:a="http://schemas.openxmlformats.org/drawingml/2006/main" xmlns:r="http://schemas.openxmlformats.org/officeDocument/2006/relationships" xmlns:p="http://schemas.openxmlformats.org/presentationml/2006/main">
   <p:cSld>
+    <p:bg>
+      <p:bgPr>
+        <a:solidFill>
+          <a:schemeClr val="bg1">
+            <a:lumMod val="85000"/>
+          </a:schemeClr>
+        </a:solidFill>
+        <a:effectLst/>
+      </p:bgPr>
+    </p:bg>
     <p:spTree>
       <p:nvGrpSpPr>
         <p:cNvPr id="1" name=""/>
@@ -8435,6 +8535,16 @@
 <file path=ppt/slides/slide8.xml><?xml version="1.0" encoding="utf-8"?>
 <p:sld xmlns:a="http://schemas.openxmlformats.org/drawingml/2006/main" xmlns:r="http://schemas.openxmlformats.org/officeDocument/2006/relationships" xmlns:p="http://schemas.openxmlformats.org/presentationml/2006/main">
   <p:cSld>
+    <p:bg>
+      <p:bgPr>
+        <a:solidFill>
+          <a:schemeClr val="bg1">
+            <a:lumMod val="85000"/>
+          </a:schemeClr>
+        </a:solidFill>
+        <a:effectLst/>
+      </p:bgPr>
+    </p:bg>
     <p:spTree>
       <p:nvGrpSpPr>
         <p:cNvPr id="1" name=""/>
@@ -8675,6 +8785,16 @@
 <file path=ppt/slides/slide9.xml><?xml version="1.0" encoding="utf-8"?>
 <p:sld xmlns:a="http://schemas.openxmlformats.org/drawingml/2006/main" xmlns:r="http://schemas.openxmlformats.org/officeDocument/2006/relationships" xmlns:p="http://schemas.openxmlformats.org/presentationml/2006/main">
   <p:cSld>
+    <p:bg>
+      <p:bgPr>
+        <a:solidFill>
+          <a:schemeClr val="bg1">
+            <a:lumMod val="85000"/>
+          </a:schemeClr>
+        </a:solidFill>
+        <a:effectLst/>
+      </p:bgPr>
+    </p:bg>
     <p:spTree>
       <p:nvGrpSpPr>
         <p:cNvPr id="1" name=""/>

--- a/topic01-objects-and-classes/unit-1/talk-0/Understanding_the_JVM.pptx
+++ b/topic01-objects-and-classes/unit-1/talk-0/Understanding_the_JVM.pptx
@@ -554,7 +554,7 @@
               </a14:hiddenLine>
             </a:ext>
             <a:ext uri="{FAA26D3D-D897-4be2-8F04-BA451C77F1D7}">
-              <ma14:placeholderFlag xmlns:ma14="http://schemas.microsoft.com/office/mac/drawingml/2011/main" xmlns="" val="1"/>
+              <ma14:placeholderFlag xmlns="" xmlns:ma14="http://schemas.microsoft.com/office/mac/drawingml/2011/main" val="1"/>
             </a:ext>
           </a:extLst>
         </p:spPr>
@@ -5094,9 +5094,15 @@
       </p:sp>
       <p:pic>
         <p:nvPicPr>
-          <p:cNvPr id="3074" name="Picture 2" descr="Image result for questions"/>
+          <p:cNvPr id="4" name="Picture 3" descr="A green question mark in a circle&#10;&#10;AI-generated content may be incorrect.">
+            <a:extLst>
+              <a:ext uri="{FF2B5EF4-FFF2-40B4-BE49-F238E27FC236}">
+                <a16:creationId xmlns:a16="http://schemas.microsoft.com/office/drawing/2014/main" id="{EA9FEA22-4755-30D5-B4EC-3188286FD808}"/>
+              </a:ext>
+            </a:extLst>
+          </p:cNvPr>
           <p:cNvPicPr>
-            <a:picLocks noChangeAspect="1" noChangeArrowheads="1"/>
+            <a:picLocks noChangeAspect="1"/>
           </p:cNvPicPr>
           <p:nvPr/>
         </p:nvPicPr>
@@ -5108,29 +5114,18 @@
               </a:ext>
             </a:extLst>
           </a:blip>
-          <a:srcRect/>
           <a:stretch>
             <a:fillRect/>
           </a:stretch>
         </p:blipFill>
-        <p:spPr bwMode="auto">
+        <p:spPr>
           <a:xfrm>
-            <a:off x="3810000" y="2057401"/>
-            <a:ext cx="4343400" cy="3509469"/>
+            <a:off x="2971800" y="1325562"/>
+            <a:ext cx="5257800" cy="5257800"/>
           </a:xfrm>
           <a:prstGeom prst="rect">
             <a:avLst/>
           </a:prstGeom>
-          <a:noFill/>
-          <a:extLst>
-            <a:ext uri="{909E8E84-426E-40DD-AFC4-6F175D3DCCD1}">
-              <a14:hiddenFill xmlns:a14="http://schemas.microsoft.com/office/drawing/2010/main">
-                <a:solidFill>
-                  <a:srgbClr val="FFFFFF"/>
-                </a:solidFill>
-              </a14:hiddenFill>
-            </a:ext>
-          </a:extLst>
         </p:spPr>
       </p:pic>
     </p:spTree>
